--- a/curso_es/pptx/S10.pptx
+++ b/curso_es/pptx/S10.pptx
@@ -3801,7 +3801,7 @@
                 </a:solidFill>
                 <a:latin typeface="Nunito Sans"/>
               </a:rPr>
-              <a:t>«Todos los jugadores del equipo tienen que pasar el reconocimiento médico. Naiara es del equipo. Por tanto, Naiara tiene que pasarlo.»</a:t>
+              <a:t>«Todos los jugadores del equipo tienen que pasar el reconocimiento médico. Una chica es del equipo. Por tanto, esa chica tiene que pasarlo.»</a:t>
             </a:r>
           </a:p>
         </p:txBody>
@@ -4151,7 +4151,7 @@
                 </a:solidFill>
                 <a:latin typeface="Nunito Sans"/>
               </a:rPr>
-              <a:t>¿De dónde sale la conclusión? De casos que Kevin ha vivido.</a:t>
+              <a:t>¿De dónde sale la conclusión? De casos que ese chico ha vivido.</a:t>
             </a:r>
           </a:p>
           <a:p>
@@ -4757,7 +4757,7 @@
                 </a:solidFill>
                 <a:latin typeface="Nunito Sans"/>
               </a:rPr>
-              <a:t>«Todos los de 2.º B tienen Inglés. Aitor tiene Inglés. Por tanto, Aitor es de 2.º B.»</a:t>
+              <a:t>«Todos los de 2.º B tienen Inglés. Un chico tiene Inglés. Por tanto, ese chico es de 2.º B.»</a:t>
             </a:r>
           </a:p>
         </p:txBody>
@@ -4855,7 +4855,7 @@
                 </a:solidFill>
                 <a:latin typeface="Nunito Sans"/>
               </a:rPr>
-              <a:t>Las dos premisas pueden ser verdad y Aitor ser de 2.º A, que también tiene Inglés.</a:t>
+              <a:t>Las dos premisas pueden ser verdad y ese chico ser de 2.º A, que también tiene Inglés.</a:t>
             </a:r>
           </a:p>
           <a:p>
@@ -7051,7 +7051,7 @@
                 </a:solidFill>
                 <a:latin typeface="Nunito Sans"/>
               </a:rPr>
-              <a:t>Kevin: «Todas las veces que he pedido pizza en ese sitio ha llegado fría. Hoy también llegará fría».</a:t>
+              <a:t>Un chico: «Todas las veces que he pedido pizza en ese sitio ha llegado fría. Hoy también llegará fría».</a:t>
             </a:r>
           </a:p>
         </p:txBody>
@@ -7471,7 +7471,7 @@
                 </a:solidFill>
                 <a:latin typeface="Nunito Sans"/>
               </a:rPr>
-              <a:t>P2: Aitor es de 2.º</a:t>
+              <a:t>P2: un chico es de 2.º</a:t>
             </a:r>
           </a:p>
           <a:p>
@@ -7496,7 +7496,7 @@
                 </a:solidFill>
                 <a:latin typeface="Nunito Sans"/>
               </a:rPr>
-              <a:t>C: Por tanto, Aitor tiene Inglés</a:t>
+              <a:t>C: Por tanto, ese chico tiene Inglés</a:t>
             </a:r>
           </a:p>
         </p:txBody>
